--- a/docs/lectures/in-class_activities/class_19.pptx
+++ b/docs/lectures/in-class_activities/class_19.pptx
@@ -202,7 +202,7 @@
           <a:p>
             <a:fld id="{6AC7DB66-C6D6-B24E-B345-FA3772C924EA}" type="datetimeFigureOut">
               <a:rPr lang="en-US" smtClean="0"/>
-              <a:t>11/15/21</a:t>
+              <a:t>11/14/25</a:t>
             </a:fld>
             <a:endParaRPr lang="en-US"/>
           </a:p>
@@ -1129,7 +1129,7 @@
           <a:p>
             <a:fld id="{21DDE3A9-9D48-7D40-AF95-520AE186EA5D}" type="datetimeFigureOut">
               <a:rPr lang="en-US" smtClean="0"/>
-              <a:t>11/15/21</a:t>
+              <a:t>11/14/25</a:t>
             </a:fld>
             <a:endParaRPr lang="en-US"/>
           </a:p>
@@ -1327,7 +1327,7 @@
           <a:p>
             <a:fld id="{21DDE3A9-9D48-7D40-AF95-520AE186EA5D}" type="datetimeFigureOut">
               <a:rPr lang="en-US" smtClean="0"/>
-              <a:t>11/15/21</a:t>
+              <a:t>11/14/25</a:t>
             </a:fld>
             <a:endParaRPr lang="en-US"/>
           </a:p>
@@ -1535,7 +1535,7 @@
           <a:p>
             <a:fld id="{21DDE3A9-9D48-7D40-AF95-520AE186EA5D}" type="datetimeFigureOut">
               <a:rPr lang="en-US" smtClean="0"/>
-              <a:t>11/15/21</a:t>
+              <a:t>11/14/25</a:t>
             </a:fld>
             <a:endParaRPr lang="en-US"/>
           </a:p>
@@ -1733,7 +1733,7 @@
           <a:p>
             <a:fld id="{21DDE3A9-9D48-7D40-AF95-520AE186EA5D}" type="datetimeFigureOut">
               <a:rPr lang="en-US" smtClean="0"/>
-              <a:t>11/15/21</a:t>
+              <a:t>11/14/25</a:t>
             </a:fld>
             <a:endParaRPr lang="en-US"/>
           </a:p>
@@ -2008,7 +2008,7 @@
           <a:p>
             <a:fld id="{21DDE3A9-9D48-7D40-AF95-520AE186EA5D}" type="datetimeFigureOut">
               <a:rPr lang="en-US" smtClean="0"/>
-              <a:t>11/15/21</a:t>
+              <a:t>11/14/25</a:t>
             </a:fld>
             <a:endParaRPr lang="en-US"/>
           </a:p>
@@ -2273,7 +2273,7 @@
           <a:p>
             <a:fld id="{21DDE3A9-9D48-7D40-AF95-520AE186EA5D}" type="datetimeFigureOut">
               <a:rPr lang="en-US" smtClean="0"/>
-              <a:t>11/15/21</a:t>
+              <a:t>11/14/25</a:t>
             </a:fld>
             <a:endParaRPr lang="en-US"/>
           </a:p>
@@ -2685,7 +2685,7 @@
           <a:p>
             <a:fld id="{21DDE3A9-9D48-7D40-AF95-520AE186EA5D}" type="datetimeFigureOut">
               <a:rPr lang="en-US" smtClean="0"/>
-              <a:t>11/15/21</a:t>
+              <a:t>11/14/25</a:t>
             </a:fld>
             <a:endParaRPr lang="en-US"/>
           </a:p>
@@ -2826,7 +2826,7 @@
           <a:p>
             <a:fld id="{21DDE3A9-9D48-7D40-AF95-520AE186EA5D}" type="datetimeFigureOut">
               <a:rPr lang="en-US" smtClean="0"/>
-              <a:t>11/15/21</a:t>
+              <a:t>11/14/25</a:t>
             </a:fld>
             <a:endParaRPr lang="en-US"/>
           </a:p>
@@ -2939,7 +2939,7 @@
           <a:p>
             <a:fld id="{21DDE3A9-9D48-7D40-AF95-520AE186EA5D}" type="datetimeFigureOut">
               <a:rPr lang="en-US" smtClean="0"/>
-              <a:t>11/15/21</a:t>
+              <a:t>11/14/25</a:t>
             </a:fld>
             <a:endParaRPr lang="en-US"/>
           </a:p>
@@ -3250,7 +3250,7 @@
           <a:p>
             <a:fld id="{21DDE3A9-9D48-7D40-AF95-520AE186EA5D}" type="datetimeFigureOut">
               <a:rPr lang="en-US" smtClean="0"/>
-              <a:t>11/15/21</a:t>
+              <a:t>11/14/25</a:t>
             </a:fld>
             <a:endParaRPr lang="en-US"/>
           </a:p>
@@ -3538,7 +3538,7 @@
           <a:p>
             <a:fld id="{21DDE3A9-9D48-7D40-AF95-520AE186EA5D}" type="datetimeFigureOut">
               <a:rPr lang="en-US" smtClean="0"/>
-              <a:t>11/15/21</a:t>
+              <a:t>11/14/25</a:t>
             </a:fld>
             <a:endParaRPr lang="en-US"/>
           </a:p>
@@ -3779,7 +3779,7 @@
           <a:p>
             <a:fld id="{21DDE3A9-9D48-7D40-AF95-520AE186EA5D}" type="datetimeFigureOut">
               <a:rPr lang="en-US" smtClean="0"/>
-              <a:t>11/15/21</a:t>
+              <a:t>11/14/25</a:t>
             </a:fld>
             <a:endParaRPr lang="en-US"/>
           </a:p>
@@ -4248,7 +4248,7 @@
                 <a:latin typeface="Avenir Book" panose="02000503020000020003" pitchFamily="2" charset="0"/>
                 <a:cs typeface="Avenir"/>
               </a:rPr>
-              <a:t>Practical session 19</a:t>
+              <a:t>Class 19</a:t>
             </a:r>
             <a:r>
               <a:rPr lang="en-US" sz="4800" dirty="0">
@@ -4270,25 +4270,8 @@
                 <a:latin typeface="Avenir Book" panose="02000503020000020003" pitchFamily="2" charset="0"/>
                 <a:cs typeface="Avenir"/>
               </a:rPr>
-              <a:t>Nematomorphs </a:t>
-            </a:r>
-            <a:r>
-              <a:rPr lang="en-US" sz="4800">
-                <a:solidFill>
-                  <a:srgbClr val="FFFFFF"/>
-                </a:solidFill>
-                <a:latin typeface="Avenir Book" panose="02000503020000020003" pitchFamily="2" charset="0"/>
-                <a:cs typeface="Avenir"/>
-              </a:rPr>
-              <a:t>and acanthocephalans</a:t>
-            </a:r>
-            <a:endParaRPr lang="en-US" sz="4800" dirty="0">
-              <a:solidFill>
-                <a:srgbClr val="FFFFFF"/>
-              </a:solidFill>
-              <a:latin typeface="Avenir Book" panose="02000503020000020003" pitchFamily="2" charset="0"/>
-              <a:cs typeface="Avenir"/>
-            </a:endParaRPr>
+              <a:t>Nematomorphs and acanthocephalans</a:t>
+            </a:r>
           </a:p>
         </p:txBody>
       </p:sp>
@@ -5417,7 +5400,7 @@
               <a:defRPr/>
             </a:pPr>
             <a:r>
-              <a:rPr lang="en-US" sz="4800" b="1" dirty="0">
+              <a:rPr lang="en-US" sz="4800" b="1">
                 <a:solidFill>
                   <a:schemeClr val="bg1">
                     <a:lumMod val="65000"/>
@@ -5426,7 +5409,7 @@
                 <a:latin typeface="Avenir Book" panose="02000503020000020003" pitchFamily="2" charset="0"/>
                 <a:cs typeface="Avenir"/>
               </a:rPr>
-              <a:t>Practical session 19</a:t>
+              <a:t>Class 19</a:t>
             </a:r>
             <a:r>
               <a:rPr lang="en-US" sz="4800" dirty="0">
